--- a/atelier/atelier-x01-facebook-cover.pptx
+++ b/atelier/atelier-x01-facebook-cover.pptx
@@ -3399,7 +3399,7 @@
         </p:nvSpPr>
         <p:spPr>
           <a:xfrm>
-            <a:off x="1419225" y="671512"/>
+            <a:off x="1419225" y="694879"/>
             <a:ext cx="2381964" cy="95250"/>
           </a:xfrm>
           <a:prstGeom prst="rect">
@@ -3434,8 +3434,8 @@
         </p:nvSpPr>
         <p:spPr>
           <a:xfrm>
-            <a:off x="1419225" y="804862"/>
-            <a:ext cx="2381964" cy="257175"/>
+            <a:off x="1419225" y="828229"/>
+            <a:ext cx="2381964" cy="210294"/>
           </a:xfrm>
           <a:prstGeom prst="rect">
             <a:avLst/>
@@ -3446,7 +3446,11 @@
           <a:bodyPr wrap="none" anchor="t" lIns="0" rIns="0" tIns="0" bIns="0"/>
           <a:lstStyle/>
           <a:p>
-            <a:pPr algn="l"/>
+            <a:pPr algn="l">
+              <a:lnSpc>
+                <a:spcPct val="92000"/>
+              </a:lnSpc>
+            </a:pPr>
             <a:r>
               <a:rPr sz="1800" i="1" b="0">
                 <a:solidFill>
@@ -3469,7 +3473,7 @@
         </p:nvSpPr>
         <p:spPr>
           <a:xfrm>
-            <a:off x="666750" y="2519362"/>
+            <a:off x="666750" y="2599283"/>
             <a:ext cx="13271421" cy="114300"/>
           </a:xfrm>
           <a:prstGeom prst="rect">
@@ -3504,8 +3508,8 @@
         </p:nvSpPr>
         <p:spPr>
           <a:xfrm>
-            <a:off x="666750" y="2747962"/>
-            <a:ext cx="13271421" cy="790575"/>
+            <a:off x="666750" y="2827883"/>
+            <a:ext cx="13271421" cy="630882"/>
           </a:xfrm>
           <a:prstGeom prst="rect">
             <a:avLst/>
@@ -3516,7 +3520,11 @@
           <a:bodyPr wrap="none" anchor="t" lIns="0" rIns="0" tIns="0" bIns="0"/>
           <a:lstStyle/>
           <a:p>
-            <a:pPr algn="l"/>
+            <a:pPr algn="l">
+              <a:lnSpc>
+                <a:spcPct val="92000"/>
+              </a:lnSpc>
+            </a:pPr>
             <a:r>
               <a:rPr sz="5400" i="1" b="0">
                 <a:solidFill>
